--- a/morning-registration-activities/form-time-quiz/downloads/Form_Time_Quiz_Volume_Two_Year_7_to_9.pptx
+++ b/morning-registration-activities/form-time-quiz/downloads/Form_Time_Quiz_Volume_Two_Year_7_to_9.pptx
@@ -3193,7 +3193,7 @@
                 <a:solidFill>
                   <a:srgbClr val="2B6573"/>
                 </a:solidFill>
-                <a:latin typeface="Karla"/>
+                <a:latin typeface="Calibri"/>
               </a:rPr>
               <a:t>MORNING REGISTRATION ACTIVITIES</a:t>
             </a:r>
@@ -3231,11 +3231,11 @@
               </a:spcAft>
             </a:pPr>
             <a:r>
-              <a:rPr sz="3000" b="1" i="0">
+              <a:rPr sz="3000" b="0" i="0">
                 <a:solidFill>
                   <a:srgbClr val="2B6573"/>
                 </a:solidFill>
-                <a:latin typeface="Libre Caslon Display"/>
+                <a:latin typeface="Georgia"/>
               </a:rPr>
               <a:t>The Form Time Quiz</a:t>
             </a:r>
@@ -3290,7 +3290,7 @@
                 <a:solidFill>
                   <a:srgbClr val="FFFDF7"/>
                 </a:solidFill>
-                <a:latin typeface="Karla"/>
+                <a:latin typeface="Calibri"/>
               </a:rPr>
               <a:t>VOLUME TWO  ·  YEAR 7 TO 9</a:t>
             </a:r>
@@ -3332,7 +3332,7 @@
                 <a:solidFill>
                   <a:srgbClr val="5C6552"/>
                 </a:solidFill>
-                <a:latin typeface="Karla"/>
+                <a:latin typeface="Calibri"/>
               </a:rPr>
               <a:t>Ten questions: six on animal myths, then four of general knowledge.</a:t>
             </a:r>
@@ -3482,11 +3482,11 @@
               </a:spcAft>
             </a:pPr>
             <a:r>
-              <a:rPr sz="1350" b="1" i="0">
+              <a:rPr sz="1350" b="0" i="0">
                 <a:solidFill>
                   <a:srgbClr val="2B6573"/>
                 </a:solidFill>
-                <a:latin typeface="Libre Caslon Display"/>
+                <a:latin typeface="Georgia"/>
               </a:rPr>
               <a:t>Get into teams</a:t>
             </a:r>
@@ -3528,7 +3528,7 @@
                 <a:solidFill>
                   <a:srgbClr val="5C6552"/>
                 </a:solidFill>
-                <a:latin typeface="Karla"/>
+                <a:latin typeface="Calibri"/>
               </a:rPr>
               <a:t>Three or four to a team, with one answer sheet between you.</a:t>
             </a:r>
@@ -3678,11 +3678,11 @@
               </a:spcAft>
             </a:pPr>
             <a:r>
-              <a:rPr sz="1350" b="1" i="0">
+              <a:rPr sz="1350" b="0" i="0">
                 <a:solidFill>
                   <a:srgbClr val="2B6573"/>
                 </a:solidFill>
-                <a:latin typeface="Libre Caslon Display"/>
+                <a:latin typeface="Georgia"/>
               </a:rPr>
               <a:t>Answer together</a:t>
             </a:r>
@@ -3724,7 +3724,7 @@
                 <a:solidFill>
                   <a:srgbClr val="5C6552"/>
                 </a:solidFill>
-                <a:latin typeface="Karla"/>
+                <a:latin typeface="Calibri"/>
               </a:rPr>
               <a:t>Each question goes up on the board. Agree an answer, then write it down.</a:t>
             </a:r>
@@ -3874,11 +3874,11 @@
               </a:spcAft>
             </a:pPr>
             <a:r>
-              <a:rPr sz="1350" b="1" i="0">
+              <a:rPr sz="1350" b="0" i="0">
                 <a:solidFill>
                   <a:srgbClr val="2B6573"/>
                 </a:solidFill>
-                <a:latin typeface="Libre Caslon Display"/>
+                <a:latin typeface="Georgia"/>
               </a:rPr>
               <a:t>Swap and mark</a:t>
             </a:r>
@@ -3920,7 +3920,7 @@
                 <a:solidFill>
                   <a:srgbClr val="5C6552"/>
                 </a:solidFill>
-                <a:latin typeface="Karla"/>
+                <a:latin typeface="Calibri"/>
               </a:rPr>
               <a:t>Swap sheets with the team next to you, then the answers go up one at a time.</a:t>
             </a:r>
@@ -3962,7 +3962,7 @@
                 <a:solidFill>
                   <a:srgbClr val="8B9179"/>
                 </a:solidFill>
-                <a:latin typeface="Karla"/>
+                <a:latin typeface="Calibri"/>
               </a:rPr>
               <a:t>Needs: one answer sheet per team, from the resource pack.</a:t>
             </a:r>
@@ -4028,7 +4028,7 @@
                 <a:solidFill>
                   <a:srgbClr val="8B9179"/>
                 </a:solidFill>
-                <a:latin typeface="Karla"/>
+                <a:latin typeface="Calibri"/>
               </a:rPr>
               <a:t>The Pastoral Guide</a:t>
             </a:r>
@@ -4070,7 +4070,7 @@
                 <a:solidFill>
                   <a:srgbClr val="8B9179"/>
                 </a:solidFill>
-                <a:latin typeface="Karla"/>
+                <a:latin typeface="Calibri"/>
               </a:rPr>
               <a:t>1 / 27</a:t>
             </a:r>
@@ -4174,7 +4174,7 @@
                 <a:solidFill>
                   <a:srgbClr val="2B6573"/>
                 </a:solidFill>
-                <a:latin typeface="Karla"/>
+                <a:latin typeface="Calibri"/>
               </a:rPr>
               <a:t>THE FORM TIME QUIZ  ·  ROUND TWO  ·  QUESTION 7 OF 10</a:t>
             </a:r>
@@ -4350,7 +4350,7 @@
                 <a:solidFill>
                   <a:srgbClr val="FFFDF7"/>
                 </a:solidFill>
-                <a:latin typeface="Karla"/>
+                <a:latin typeface="Calibri"/>
               </a:rPr>
               <a:t>7</a:t>
             </a:r>
@@ -4388,11 +4388,11 @@
               </a:spcAft>
             </a:pPr>
             <a:r>
-              <a:rPr sz="2400" b="1" i="0">
+              <a:rPr sz="2400" b="0" i="0">
                 <a:solidFill>
                   <a:srgbClr val="2B6573"/>
                 </a:solidFill>
-                <a:latin typeface="Libre Caslon Display"/>
+                <a:latin typeface="Georgia"/>
               </a:rPr>
               <a:t>What is the largest planet in our solar system?</a:t>
             </a:r>
@@ -4434,7 +4434,7 @@
                 <a:solidFill>
                   <a:srgbClr val="8B9179"/>
                 </a:solidFill>
-                <a:latin typeface="Karla"/>
+                <a:latin typeface="Calibri"/>
               </a:rPr>
               <a:t>ONE OF THESE</a:t>
             </a:r>
@@ -4610,7 +4610,7 @@
                 <a:solidFill>
                   <a:srgbClr val="FFFDF7"/>
                 </a:solidFill>
-                <a:latin typeface="Karla"/>
+                <a:latin typeface="Calibri"/>
               </a:rPr>
               <a:t>A</a:t>
             </a:r>
@@ -4652,7 +4652,7 @@
                 <a:solidFill>
                   <a:srgbClr val="2E3436"/>
                 </a:solidFill>
-                <a:latin typeface="Karla"/>
+                <a:latin typeface="Calibri"/>
               </a:rPr>
               <a:t>Saturn</a:t>
             </a:r>
@@ -4828,7 +4828,7 @@
                 <a:solidFill>
                   <a:srgbClr val="FFFDF7"/>
                 </a:solidFill>
-                <a:latin typeface="Karla"/>
+                <a:latin typeface="Calibri"/>
               </a:rPr>
               <a:t>B</a:t>
             </a:r>
@@ -4870,7 +4870,7 @@
                 <a:solidFill>
                   <a:srgbClr val="2E3436"/>
                 </a:solidFill>
-                <a:latin typeface="Karla"/>
+                <a:latin typeface="Calibri"/>
               </a:rPr>
               <a:t>Jupiter</a:t>
             </a:r>
@@ -5046,7 +5046,7 @@
                 <a:solidFill>
                   <a:srgbClr val="FFFDF7"/>
                 </a:solidFill>
-                <a:latin typeface="Karla"/>
+                <a:latin typeface="Calibri"/>
               </a:rPr>
               <a:t>C</a:t>
             </a:r>
@@ -5088,7 +5088,7 @@
                 <a:solidFill>
                   <a:srgbClr val="2E3436"/>
                 </a:solidFill>
-                <a:latin typeface="Karla"/>
+                <a:latin typeface="Calibri"/>
               </a:rPr>
               <a:t>Neptune</a:t>
             </a:r>
@@ -5130,7 +5130,7 @@
                 <a:solidFill>
                   <a:srgbClr val="5C6552"/>
                 </a:solidFill>
-                <a:latin typeface="Karla"/>
+                <a:latin typeface="Calibri"/>
               </a:rPr>
               <a:t>Agree it as a team, then tick it on the sheet.</a:t>
             </a:r>
@@ -5196,7 +5196,7 @@
                 <a:solidFill>
                   <a:srgbClr val="8B9179"/>
                 </a:solidFill>
-                <a:latin typeface="Karla"/>
+                <a:latin typeface="Calibri"/>
               </a:rPr>
               <a:t>The Pastoral Guide</a:t>
             </a:r>
@@ -5238,7 +5238,7 @@
                 <a:solidFill>
                   <a:srgbClr val="8B9179"/>
                 </a:solidFill>
-                <a:latin typeface="Karla"/>
+                <a:latin typeface="Calibri"/>
               </a:rPr>
               <a:t>10 / 27</a:t>
             </a:r>
@@ -5342,7 +5342,7 @@
                 <a:solidFill>
                   <a:srgbClr val="2B6573"/>
                 </a:solidFill>
-                <a:latin typeface="Karla"/>
+                <a:latin typeface="Calibri"/>
               </a:rPr>
               <a:t>THE FORM TIME QUIZ  ·  ROUND TWO  ·  QUESTION 8 OF 10</a:t>
             </a:r>
@@ -5518,7 +5518,7 @@
                 <a:solidFill>
                   <a:srgbClr val="FFFDF7"/>
                 </a:solidFill>
-                <a:latin typeface="Karla"/>
+                <a:latin typeface="Calibri"/>
               </a:rPr>
               <a:t>8</a:t>
             </a:r>
@@ -5556,11 +5556,11 @@
               </a:spcAft>
             </a:pPr>
             <a:r>
-              <a:rPr sz="2400" b="1" i="0">
+              <a:rPr sz="2400" b="0" i="0">
                 <a:solidFill>
                   <a:srgbClr val="2B6573"/>
                 </a:solidFill>
-                <a:latin typeface="Libre Caslon Display"/>
+                <a:latin typeface="Georgia"/>
               </a:rPr>
               <a:t>What is the capital city of Egypt?</a:t>
             </a:r>
@@ -5646,7 +5646,7 @@
                 <a:solidFill>
                   <a:srgbClr val="8B9179"/>
                 </a:solidFill>
-                <a:latin typeface="Karla"/>
+                <a:latin typeface="Calibri"/>
               </a:rPr>
               <a:t>Agree it as a team, then write it on the sheet.</a:t>
             </a:r>
@@ -5712,7 +5712,7 @@
                 <a:solidFill>
                   <a:srgbClr val="8B9179"/>
                 </a:solidFill>
-                <a:latin typeface="Karla"/>
+                <a:latin typeface="Calibri"/>
               </a:rPr>
               <a:t>The Pastoral Guide</a:t>
             </a:r>
@@ -5754,7 +5754,7 @@
                 <a:solidFill>
                   <a:srgbClr val="8B9179"/>
                 </a:solidFill>
-                <a:latin typeface="Karla"/>
+                <a:latin typeface="Calibri"/>
               </a:rPr>
               <a:t>11 / 27</a:t>
             </a:r>
@@ -5858,7 +5858,7 @@
                 <a:solidFill>
                   <a:srgbClr val="2B6573"/>
                 </a:solidFill>
-                <a:latin typeface="Karla"/>
+                <a:latin typeface="Calibri"/>
               </a:rPr>
               <a:t>THE FORM TIME QUIZ  ·  ROUND TWO  ·  QUESTION 9 OF 10</a:t>
             </a:r>
@@ -6034,7 +6034,7 @@
                 <a:solidFill>
                   <a:srgbClr val="FFFDF7"/>
                 </a:solidFill>
-                <a:latin typeface="Karla"/>
+                <a:latin typeface="Calibri"/>
               </a:rPr>
               <a:t>9</a:t>
             </a:r>
@@ -6072,11 +6072,11 @@
               </a:spcAft>
             </a:pPr>
             <a:r>
-              <a:rPr sz="2400" b="1" i="0">
+              <a:rPr sz="2400" b="0" i="0">
                 <a:solidFill>
                   <a:srgbClr val="2B6573"/>
                 </a:solidFill>
-                <a:latin typeface="Libre Caslon Display"/>
+                <a:latin typeface="Georgia"/>
               </a:rPr>
               <a:t>How many legs does a spider have?</a:t>
             </a:r>
@@ -6118,7 +6118,7 @@
                 <a:solidFill>
                   <a:srgbClr val="8B9179"/>
                 </a:solidFill>
-                <a:latin typeface="Karla"/>
+                <a:latin typeface="Calibri"/>
               </a:rPr>
               <a:t>ONE OF THESE</a:t>
             </a:r>
@@ -6294,7 +6294,7 @@
                 <a:solidFill>
                   <a:srgbClr val="FFFDF7"/>
                 </a:solidFill>
-                <a:latin typeface="Karla"/>
+                <a:latin typeface="Calibri"/>
               </a:rPr>
               <a:t>A</a:t>
             </a:r>
@@ -6336,7 +6336,7 @@
                 <a:solidFill>
                   <a:srgbClr val="2E3436"/>
                 </a:solidFill>
-                <a:latin typeface="Karla"/>
+                <a:latin typeface="Calibri"/>
               </a:rPr>
               <a:t>Six</a:t>
             </a:r>
@@ -6512,7 +6512,7 @@
                 <a:solidFill>
                   <a:srgbClr val="FFFDF7"/>
                 </a:solidFill>
-                <a:latin typeface="Karla"/>
+                <a:latin typeface="Calibri"/>
               </a:rPr>
               <a:t>B</a:t>
             </a:r>
@@ -6554,7 +6554,7 @@
                 <a:solidFill>
                   <a:srgbClr val="2E3436"/>
                 </a:solidFill>
-                <a:latin typeface="Karla"/>
+                <a:latin typeface="Calibri"/>
               </a:rPr>
               <a:t>Eight</a:t>
             </a:r>
@@ -6730,7 +6730,7 @@
                 <a:solidFill>
                   <a:srgbClr val="FFFDF7"/>
                 </a:solidFill>
-                <a:latin typeface="Karla"/>
+                <a:latin typeface="Calibri"/>
               </a:rPr>
               <a:t>C</a:t>
             </a:r>
@@ -6772,7 +6772,7 @@
                 <a:solidFill>
                   <a:srgbClr val="2E3436"/>
                 </a:solidFill>
-                <a:latin typeface="Karla"/>
+                <a:latin typeface="Calibri"/>
               </a:rPr>
               <a:t>Ten</a:t>
             </a:r>
@@ -6814,7 +6814,7 @@
                 <a:solidFill>
                   <a:srgbClr val="5C6552"/>
                 </a:solidFill>
-                <a:latin typeface="Karla"/>
+                <a:latin typeface="Calibri"/>
               </a:rPr>
               <a:t>Agree it as a team, then tick it on the sheet.</a:t>
             </a:r>
@@ -6880,7 +6880,7 @@
                 <a:solidFill>
                   <a:srgbClr val="8B9179"/>
                 </a:solidFill>
-                <a:latin typeface="Karla"/>
+                <a:latin typeface="Calibri"/>
               </a:rPr>
               <a:t>The Pastoral Guide</a:t>
             </a:r>
@@ -6922,7 +6922,7 @@
                 <a:solidFill>
                   <a:srgbClr val="8B9179"/>
                 </a:solidFill>
-                <a:latin typeface="Karla"/>
+                <a:latin typeface="Calibri"/>
               </a:rPr>
               <a:t>12 / 27</a:t>
             </a:r>
@@ -7026,7 +7026,7 @@
                 <a:solidFill>
                   <a:srgbClr val="2B6573"/>
                 </a:solidFill>
-                <a:latin typeface="Karla"/>
+                <a:latin typeface="Calibri"/>
               </a:rPr>
               <a:t>THE FORM TIME QUIZ  ·  ROUND TWO  ·  QUESTION 10 OF 10</a:t>
             </a:r>
@@ -7202,7 +7202,7 @@
                 <a:solidFill>
                   <a:srgbClr val="FFFDF7"/>
                 </a:solidFill>
-                <a:latin typeface="Karla"/>
+                <a:latin typeface="Calibri"/>
               </a:rPr>
               <a:t>10</a:t>
             </a:r>
@@ -7240,11 +7240,11 @@
               </a:spcAft>
             </a:pPr>
             <a:r>
-              <a:rPr sz="2400" b="1" i="0">
+              <a:rPr sz="2400" b="0" i="0">
                 <a:solidFill>
                   <a:srgbClr val="2B6573"/>
                 </a:solidFill>
-                <a:latin typeface="Libre Caslon Display"/>
+                <a:latin typeface="Georgia"/>
               </a:rPr>
               <a:t>Which continent has no countries?</a:t>
             </a:r>
@@ -7330,7 +7330,7 @@
                 <a:solidFill>
                   <a:srgbClr val="8B9179"/>
                 </a:solidFill>
-                <a:latin typeface="Karla"/>
+                <a:latin typeface="Calibri"/>
               </a:rPr>
               <a:t>Agree it as a team, then write it on the sheet.</a:t>
             </a:r>
@@ -7396,7 +7396,7 @@
                 <a:solidFill>
                   <a:srgbClr val="8B9179"/>
                 </a:solidFill>
-                <a:latin typeface="Karla"/>
+                <a:latin typeface="Calibri"/>
               </a:rPr>
               <a:t>The Pastoral Guide</a:t>
             </a:r>
@@ -7438,7 +7438,7 @@
                 <a:solidFill>
                   <a:srgbClr val="8B9179"/>
                 </a:solidFill>
-                <a:latin typeface="Karla"/>
+                <a:latin typeface="Calibri"/>
               </a:rPr>
               <a:t>13 / 27</a:t>
             </a:r>
@@ -7555,7 +7555,7 @@
                 <a:solidFill>
                   <a:srgbClr val="2B6573"/>
                 </a:solidFill>
-                <a:latin typeface="Karla"/>
+                <a:latin typeface="Calibri"/>
               </a:rPr>
               <a:t>ANSWERS</a:t>
             </a:r>
@@ -7593,11 +7593,11 @@
               </a:spcAft>
             </a:pPr>
             <a:r>
-              <a:rPr sz="4000" b="1" i="0">
+              <a:rPr sz="4000" b="0" i="0">
                 <a:solidFill>
                   <a:srgbClr val="FFFDF7"/>
                 </a:solidFill>
-                <a:latin typeface="Libre Caslon Display"/>
+                <a:latin typeface="Georgia"/>
               </a:rPr>
               <a:t>Swap sheets</a:t>
             </a:r>
@@ -7683,7 +7683,7 @@
                 <a:solidFill>
                   <a:srgbClr val="C4DCE1"/>
                 </a:solidFill>
-                <a:latin typeface="Karla"/>
+                <a:latin typeface="Calibri"/>
               </a:rPr>
               <a:t>Swap with the team next to you. Give one mark for each right answer, then add up the score out of ten.</a:t>
             </a:r>
@@ -7749,7 +7749,7 @@
                 <a:solidFill>
                   <a:srgbClr val="C4DCE1"/>
                 </a:solidFill>
-                <a:latin typeface="Karla"/>
+                <a:latin typeface="Calibri"/>
               </a:rPr>
               <a:t>The Pastoral Guide</a:t>
             </a:r>
@@ -7791,7 +7791,7 @@
                 <a:solidFill>
                   <a:srgbClr val="C4DCE1"/>
                 </a:solidFill>
-                <a:latin typeface="Karla"/>
+                <a:latin typeface="Calibri"/>
               </a:rPr>
               <a:t>14 / 27</a:t>
             </a:r>
@@ -7895,7 +7895,7 @@
                 <a:solidFill>
                   <a:srgbClr val="2B6573"/>
                 </a:solidFill>
-                <a:latin typeface="Karla"/>
+                <a:latin typeface="Calibri"/>
               </a:rPr>
               <a:t>THE FORM TIME QUIZ  ·  ANSWERS  ·  QUESTION 1</a:t>
             </a:r>
@@ -7937,7 +7937,7 @@
                 <a:solidFill>
                   <a:srgbClr val="5C6552"/>
                 </a:solidFill>
-                <a:latin typeface="Karla"/>
+                <a:latin typeface="Calibri"/>
               </a:rPr>
               <a:t>Bats are blind.</a:t>
             </a:r>
@@ -7975,11 +7975,11 @@
               </a:spcAft>
             </a:pPr>
             <a:r>
-              <a:rPr sz="3400" b="1" i="0">
+              <a:rPr sz="3400" b="0" i="0">
                 <a:solidFill>
                   <a:srgbClr val="2B6573"/>
                 </a:solidFill>
-                <a:latin typeface="Libre Caslon Display"/>
+                <a:latin typeface="Georgia"/>
               </a:rPr>
               <a:t>Myth</a:t>
             </a:r>
@@ -8111,7 +8111,7 @@
                 <a:solidFill>
                   <a:srgbClr val="2E3436"/>
                 </a:solidFill>
-                <a:latin typeface="Karla"/>
+                <a:latin typeface="Calibri"/>
               </a:rPr>
               <a:t>Bats can see. Their eyes are small but work well in dim light, and many bats also find their way using echoes.</a:t>
             </a:r>
@@ -8177,7 +8177,7 @@
                 <a:solidFill>
                   <a:srgbClr val="8B9179"/>
                 </a:solidFill>
-                <a:latin typeface="Karla"/>
+                <a:latin typeface="Calibri"/>
               </a:rPr>
               <a:t>The Pastoral Guide</a:t>
             </a:r>
@@ -8219,7 +8219,7 @@
                 <a:solidFill>
                   <a:srgbClr val="8B9179"/>
                 </a:solidFill>
-                <a:latin typeface="Karla"/>
+                <a:latin typeface="Calibri"/>
               </a:rPr>
               <a:t>15 / 27</a:t>
             </a:r>
@@ -8261,7 +8261,7 @@
                 <a:solidFill>
                   <a:srgbClr val="8B9179"/>
                 </a:solidFill>
-                <a:latin typeface="Karla"/>
+                <a:latin typeface="Calibri"/>
               </a:rPr>
               <a:t>Source: US Geological Survey</a:t>
             </a:r>
@@ -8365,7 +8365,7 @@
                 <a:solidFill>
                   <a:srgbClr val="2B6573"/>
                 </a:solidFill>
-                <a:latin typeface="Karla"/>
+                <a:latin typeface="Calibri"/>
               </a:rPr>
               <a:t>THE FORM TIME QUIZ  ·  ANSWERS  ·  QUESTION 2</a:t>
             </a:r>
@@ -8407,7 +8407,7 @@
                 <a:solidFill>
                   <a:srgbClr val="5C6552"/>
                 </a:solidFill>
-                <a:latin typeface="Karla"/>
+                <a:latin typeface="Calibri"/>
               </a:rPr>
               <a:t>Lemmings jump off cliffs together on purpose.</a:t>
             </a:r>
@@ -8445,11 +8445,11 @@
               </a:spcAft>
             </a:pPr>
             <a:r>
-              <a:rPr sz="3400" b="1" i="0">
+              <a:rPr sz="3400" b="0" i="0">
                 <a:solidFill>
                   <a:srgbClr val="2B6573"/>
                 </a:solidFill>
-                <a:latin typeface="Libre Caslon Display"/>
+                <a:latin typeface="Georgia"/>
               </a:rPr>
               <a:t>Myth</a:t>
             </a:r>
@@ -8581,7 +8581,7 @@
                 <a:solidFill>
                   <a:srgbClr val="2E3436"/>
                 </a:solidFill>
-                <a:latin typeface="Karla"/>
+                <a:latin typeface="Calibri"/>
               </a:rPr>
               <a:t>The famous film of lemmings jumping was made by Disney in 1958, and the filmmakers pushed the lemmings off the cliff themselves.</a:t>
             </a:r>
@@ -8647,7 +8647,7 @@
                 <a:solidFill>
                   <a:srgbClr val="8B9179"/>
                 </a:solidFill>
-                <a:latin typeface="Karla"/>
+                <a:latin typeface="Calibri"/>
               </a:rPr>
               <a:t>The Pastoral Guide</a:t>
             </a:r>
@@ -8689,7 +8689,7 @@
                 <a:solidFill>
                   <a:srgbClr val="8B9179"/>
                 </a:solidFill>
-                <a:latin typeface="Karla"/>
+                <a:latin typeface="Calibri"/>
               </a:rPr>
               <a:t>16 / 27</a:t>
             </a:r>
@@ -8731,7 +8731,7 @@
                 <a:solidFill>
                   <a:srgbClr val="8B9179"/>
                 </a:solidFill>
-                <a:latin typeface="Karla"/>
+                <a:latin typeface="Calibri"/>
               </a:rPr>
               <a:t>Source: Alaska Department of Fish and Game</a:t>
             </a:r>
@@ -8835,7 +8835,7 @@
                 <a:solidFill>
                   <a:srgbClr val="2B6573"/>
                 </a:solidFill>
-                <a:latin typeface="Karla"/>
+                <a:latin typeface="Calibri"/>
               </a:rPr>
               <a:t>THE FORM TIME QUIZ  ·  ANSWERS  ·  QUESTION 3</a:t>
             </a:r>
@@ -8877,7 +8877,7 @@
                 <a:solidFill>
                   <a:srgbClr val="5C6552"/>
                 </a:solidFill>
-                <a:latin typeface="Karla"/>
+                <a:latin typeface="Calibri"/>
               </a:rPr>
               <a:t>What does a camel store in its hump?</a:t>
             </a:r>
@@ -8915,11 +8915,11 @@
               </a:spcAft>
             </a:pPr>
             <a:r>
-              <a:rPr sz="3400" b="1" i="0">
+              <a:rPr sz="3400" b="0" i="0">
                 <a:solidFill>
                   <a:srgbClr val="2B6573"/>
                 </a:solidFill>
-                <a:latin typeface="Libre Caslon Display"/>
+                <a:latin typeface="Georgia"/>
               </a:rPr>
               <a:t>B.  Fat</a:t>
             </a:r>
@@ -9051,7 +9051,7 @@
                 <a:solidFill>
                   <a:srgbClr val="2E3436"/>
                 </a:solidFill>
-                <a:latin typeface="Karla"/>
+                <a:latin typeface="Calibri"/>
               </a:rPr>
               <a:t>The hump is a store of fat. The camel uses it for energy when it cannot find food.</a:t>
             </a:r>
@@ -9117,7 +9117,7 @@
                 <a:solidFill>
                   <a:srgbClr val="8B9179"/>
                 </a:solidFill>
-                <a:latin typeface="Karla"/>
+                <a:latin typeface="Calibri"/>
               </a:rPr>
               <a:t>The Pastoral Guide</a:t>
             </a:r>
@@ -9159,7 +9159,7 @@
                 <a:solidFill>
                   <a:srgbClr val="8B9179"/>
                 </a:solidFill>
-                <a:latin typeface="Karla"/>
+                <a:latin typeface="Calibri"/>
               </a:rPr>
               <a:t>17 / 27</a:t>
             </a:r>
@@ -9201,7 +9201,7 @@
                 <a:solidFill>
                   <a:srgbClr val="8B9179"/>
                 </a:solidFill>
-                <a:latin typeface="Karla"/>
+                <a:latin typeface="Calibri"/>
               </a:rPr>
               <a:t>Source: San Diego Zoo Wildlife Alliance</a:t>
             </a:r>
@@ -9305,7 +9305,7 @@
                 <a:solidFill>
                   <a:srgbClr val="2B6573"/>
                 </a:solidFill>
-                <a:latin typeface="Karla"/>
+                <a:latin typeface="Calibri"/>
               </a:rPr>
               <a:t>THE FORM TIME QUIZ  ·  ANSWERS  ·  QUESTION 4</a:t>
             </a:r>
@@ -9347,7 +9347,7 @@
                 <a:solidFill>
                   <a:srgbClr val="5C6552"/>
                 </a:solidFill>
-                <a:latin typeface="Karla"/>
+                <a:latin typeface="Calibri"/>
               </a:rPr>
               <a:t>Humans have three types of colour-sensing cell in their eyes. How many types do dogs have?</a:t>
             </a:r>
@@ -9385,11 +9385,11 @@
               </a:spcAft>
             </a:pPr>
             <a:r>
-              <a:rPr sz="3400" b="1" i="0">
+              <a:rPr sz="3400" b="0" i="0">
                 <a:solidFill>
                   <a:srgbClr val="2B6573"/>
                 </a:solidFill>
-                <a:latin typeface="Libre Caslon Display"/>
+                <a:latin typeface="Georgia"/>
               </a:rPr>
               <a:t>B.  Two</a:t>
             </a:r>
@@ -9521,7 +9521,7 @@
                 <a:solidFill>
                   <a:srgbClr val="2E3436"/>
                 </a:solidFill>
-                <a:latin typeface="Karla"/>
+                <a:latin typeface="Calibri"/>
               </a:rPr>
               <a:t>So dogs do see colour, mostly blues and yellows. They mix up reds and greens, a bit like a colour-blind person.</a:t>
             </a:r>
@@ -9587,7 +9587,7 @@
                 <a:solidFill>
                   <a:srgbClr val="8B9179"/>
                 </a:solidFill>
-                <a:latin typeface="Karla"/>
+                <a:latin typeface="Calibri"/>
               </a:rPr>
               <a:t>The Pastoral Guide</a:t>
             </a:r>
@@ -9629,7 +9629,7 @@
                 <a:solidFill>
                   <a:srgbClr val="8B9179"/>
                 </a:solidFill>
-                <a:latin typeface="Karla"/>
+                <a:latin typeface="Calibri"/>
               </a:rPr>
               <a:t>18 / 27</a:t>
             </a:r>
@@ -9671,7 +9671,7 @@
                 <a:solidFill>
                   <a:srgbClr val="8B9179"/>
                 </a:solidFill>
-                <a:latin typeface="Karla"/>
+                <a:latin typeface="Calibri"/>
               </a:rPr>
               <a:t>Source: Neitz, Geist and Jacobs, 1989</a:t>
             </a:r>
@@ -9775,7 +9775,7 @@
                 <a:solidFill>
                   <a:srgbClr val="2B6573"/>
                 </a:solidFill>
-                <a:latin typeface="Karla"/>
+                <a:latin typeface="Calibri"/>
               </a:rPr>
               <a:t>THE FORM TIME QUIZ  ·  ANSWERS  ·  QUESTION 5</a:t>
             </a:r>
@@ -9817,7 +9817,7 @@
                 <a:solidFill>
                   <a:srgbClr val="5C6552"/>
                 </a:solidFill>
-                <a:latin typeface="Karla"/>
+                <a:latin typeface="Calibri"/>
               </a:rPr>
               <a:t>An owl cannot turn its head all the way round. How far can it turn its head in either direction?</a:t>
             </a:r>
@@ -9855,11 +9855,11 @@
               </a:spcAft>
             </a:pPr>
             <a:r>
-              <a:rPr sz="3400" b="1" i="0">
+              <a:rPr sz="3400" b="0" i="0">
                 <a:solidFill>
                   <a:srgbClr val="2B6573"/>
                 </a:solidFill>
-                <a:latin typeface="Libre Caslon Display"/>
+                <a:latin typeface="Georgia"/>
               </a:rPr>
               <a:t>C.  270 degrees</a:t>
             </a:r>
@@ -9991,7 +9991,7 @@
                 <a:solidFill>
                   <a:srgbClr val="2E3436"/>
                 </a:solidFill>
-                <a:latin typeface="Karla"/>
+                <a:latin typeface="Calibri"/>
               </a:rPr>
               <a:t>That is three quarters of the way round. Special bones and blood vessels in its neck mean it can do this without cutting off blood to its brain.</a:t>
             </a:r>
@@ -10057,7 +10057,7 @@
                 <a:solidFill>
                   <a:srgbClr val="8B9179"/>
                 </a:solidFill>
-                <a:latin typeface="Karla"/>
+                <a:latin typeface="Calibri"/>
               </a:rPr>
               <a:t>The Pastoral Guide</a:t>
             </a:r>
@@ -10099,7 +10099,7 @@
                 <a:solidFill>
                   <a:srgbClr val="8B9179"/>
                 </a:solidFill>
-                <a:latin typeface="Karla"/>
+                <a:latin typeface="Calibri"/>
               </a:rPr>
               <a:t>19 / 27</a:t>
             </a:r>
@@ -10141,7 +10141,7 @@
                 <a:solidFill>
                   <a:srgbClr val="8B9179"/>
                 </a:solidFill>
-                <a:latin typeface="Karla"/>
+                <a:latin typeface="Calibri"/>
               </a:rPr>
               <a:t>Source: Johns Hopkins University, 2013</a:t>
             </a:r>
@@ -10258,7 +10258,7 @@
                 <a:solidFill>
                   <a:srgbClr val="2B6573"/>
                 </a:solidFill>
-                <a:latin typeface="Karla"/>
+                <a:latin typeface="Calibri"/>
               </a:rPr>
               <a:t>ROUND ONE</a:t>
             </a:r>
@@ -10296,11 +10296,11 @@
               </a:spcAft>
             </a:pPr>
             <a:r>
-              <a:rPr sz="4000" b="1" i="0">
+              <a:rPr sz="4000" b="0" i="0">
                 <a:solidFill>
                   <a:srgbClr val="FFFDF7"/>
                 </a:solidFill>
-                <a:latin typeface="Libre Caslon Display"/>
+                <a:latin typeface="Georgia"/>
               </a:rPr>
               <a:t>Animal myths</a:t>
             </a:r>
@@ -10386,7 +10386,7 @@
                 <a:solidFill>
                   <a:srgbClr val="C4DCE1"/>
                 </a:solidFill>
-                <a:latin typeface="Karla"/>
+                <a:latin typeface="Calibri"/>
               </a:rPr>
               <a:t>Six questions. Some are fact or myth, some give you options, and some you write out in full.</a:t>
             </a:r>
@@ -10452,7 +10452,7 @@
                 <a:solidFill>
                   <a:srgbClr val="C4DCE1"/>
                 </a:solidFill>
-                <a:latin typeface="Karla"/>
+                <a:latin typeface="Calibri"/>
               </a:rPr>
               <a:t>The Pastoral Guide</a:t>
             </a:r>
@@ -10494,7 +10494,7 @@
                 <a:solidFill>
                   <a:srgbClr val="C4DCE1"/>
                 </a:solidFill>
-                <a:latin typeface="Karla"/>
+                <a:latin typeface="Calibri"/>
               </a:rPr>
               <a:t>2 / 27</a:t>
             </a:r>
@@ -10598,7 +10598,7 @@
                 <a:solidFill>
                   <a:srgbClr val="2B6573"/>
                 </a:solidFill>
-                <a:latin typeface="Karla"/>
+                <a:latin typeface="Calibri"/>
               </a:rPr>
               <a:t>THE FORM TIME QUIZ  ·  ANSWERS  ·  QUESTION 6</a:t>
             </a:r>
@@ -10640,7 +10640,7 @@
                 <a:solidFill>
                   <a:srgbClr val="5C6552"/>
                 </a:solidFill>
-                <a:latin typeface="Karla"/>
+                <a:latin typeface="Calibri"/>
               </a:rPr>
               <a:t>In a 2001 study, fish learned to escape through a net. How many months later did they still know the way out?</a:t>
             </a:r>
@@ -10678,11 +10678,11 @@
               </a:spcAft>
             </a:pPr>
             <a:r>
-              <a:rPr sz="3400" b="1" i="0">
+              <a:rPr sz="3400" b="0" i="0">
                 <a:solidFill>
                   <a:srgbClr val="2B6573"/>
                 </a:solidFill>
-                <a:latin typeface="Libre Caslon Display"/>
+                <a:latin typeface="Georgia"/>
               </a:rPr>
               <a:t>11 months</a:t>
             </a:r>
@@ -10814,7 +10814,7 @@
                 <a:solidFill>
                   <a:srgbClr val="2E3436"/>
                 </a:solidFill>
-                <a:latin typeface="Karla"/>
+                <a:latin typeface="Calibri"/>
               </a:rPr>
               <a:t>They escaped just as quickly 11 months later. So the idea that fish only remember things for three seconds is wrong.</a:t>
             </a:r>
@@ -10880,7 +10880,7 @@
                 <a:solidFill>
                   <a:srgbClr val="8B9179"/>
                 </a:solidFill>
-                <a:latin typeface="Karla"/>
+                <a:latin typeface="Calibri"/>
               </a:rPr>
               <a:t>The Pastoral Guide</a:t>
             </a:r>
@@ -10922,7 +10922,7 @@
                 <a:solidFill>
                   <a:srgbClr val="8B9179"/>
                 </a:solidFill>
-                <a:latin typeface="Karla"/>
+                <a:latin typeface="Calibri"/>
               </a:rPr>
               <a:t>20 / 27</a:t>
             </a:r>
@@ -10964,7 +10964,7 @@
                 <a:solidFill>
                   <a:srgbClr val="8B9179"/>
                 </a:solidFill>
-                <a:latin typeface="Karla"/>
+                <a:latin typeface="Calibri"/>
               </a:rPr>
               <a:t>Source: Brown, Animal Cognition, 2001</a:t>
             </a:r>
@@ -11068,7 +11068,7 @@
                 <a:solidFill>
                   <a:srgbClr val="2B6573"/>
                 </a:solidFill>
-                <a:latin typeface="Karla"/>
+                <a:latin typeface="Calibri"/>
               </a:rPr>
               <a:t>THE FORM TIME QUIZ  ·  ANSWERS  ·  QUESTION 7</a:t>
             </a:r>
@@ -11110,7 +11110,7 @@
                 <a:solidFill>
                   <a:srgbClr val="5C6552"/>
                 </a:solidFill>
-                <a:latin typeface="Karla"/>
+                <a:latin typeface="Calibri"/>
               </a:rPr>
               <a:t>What is the largest planet in our solar system?</a:t>
             </a:r>
@@ -11148,11 +11148,11 @@
               </a:spcAft>
             </a:pPr>
             <a:r>
-              <a:rPr sz="3400" b="1" i="0">
+              <a:rPr sz="3400" b="0" i="0">
                 <a:solidFill>
                   <a:srgbClr val="2B6573"/>
                 </a:solidFill>
-                <a:latin typeface="Libre Caslon Display"/>
+                <a:latin typeface="Georgia"/>
               </a:rPr>
               <a:t>B.  Jupiter</a:t>
             </a:r>
@@ -11284,7 +11284,7 @@
                 <a:solidFill>
                   <a:srgbClr val="2E3436"/>
                 </a:solidFill>
-                <a:latin typeface="Karla"/>
+                <a:latin typeface="Calibri"/>
               </a:rPr>
               <a:t>It is so big that more than a thousand Earths could fit inside it.</a:t>
             </a:r>
@@ -11350,7 +11350,7 @@
                 <a:solidFill>
                   <a:srgbClr val="8B9179"/>
                 </a:solidFill>
-                <a:latin typeface="Karla"/>
+                <a:latin typeface="Calibri"/>
               </a:rPr>
               <a:t>The Pastoral Guide</a:t>
             </a:r>
@@ -11392,7 +11392,7 @@
                 <a:solidFill>
                   <a:srgbClr val="8B9179"/>
                 </a:solidFill>
-                <a:latin typeface="Karla"/>
+                <a:latin typeface="Calibri"/>
               </a:rPr>
               <a:t>21 / 27</a:t>
             </a:r>
@@ -11496,7 +11496,7 @@
                 <a:solidFill>
                   <a:srgbClr val="2B6573"/>
                 </a:solidFill>
-                <a:latin typeface="Karla"/>
+                <a:latin typeface="Calibri"/>
               </a:rPr>
               <a:t>THE FORM TIME QUIZ  ·  ANSWERS  ·  QUESTION 8</a:t>
             </a:r>
@@ -11538,7 +11538,7 @@
                 <a:solidFill>
                   <a:srgbClr val="5C6552"/>
                 </a:solidFill>
-                <a:latin typeface="Karla"/>
+                <a:latin typeface="Calibri"/>
               </a:rPr>
               <a:t>What is the capital city of Egypt?</a:t>
             </a:r>
@@ -11576,11 +11576,11 @@
               </a:spcAft>
             </a:pPr>
             <a:r>
-              <a:rPr sz="3400" b="1" i="0">
+              <a:rPr sz="3400" b="0" i="0">
                 <a:solidFill>
                   <a:srgbClr val="2B6573"/>
                 </a:solidFill>
-                <a:latin typeface="Libre Caslon Display"/>
+                <a:latin typeface="Georgia"/>
               </a:rPr>
               <a:t>Cairo</a:t>
             </a:r>
@@ -11712,7 +11712,7 @@
                 <a:solidFill>
                   <a:srgbClr val="2E3436"/>
                 </a:solidFill>
-                <a:latin typeface="Karla"/>
+                <a:latin typeface="Calibri"/>
               </a:rPr>
               <a:t>Cairo sits on the River Nile, close to the pyramids at Giza.</a:t>
             </a:r>
@@ -11778,7 +11778,7 @@
                 <a:solidFill>
                   <a:srgbClr val="8B9179"/>
                 </a:solidFill>
-                <a:latin typeface="Karla"/>
+                <a:latin typeface="Calibri"/>
               </a:rPr>
               <a:t>The Pastoral Guide</a:t>
             </a:r>
@@ -11820,7 +11820,7 @@
                 <a:solidFill>
                   <a:srgbClr val="8B9179"/>
                 </a:solidFill>
-                <a:latin typeface="Karla"/>
+                <a:latin typeface="Calibri"/>
               </a:rPr>
               <a:t>22 / 27</a:t>
             </a:r>
@@ -11924,7 +11924,7 @@
                 <a:solidFill>
                   <a:srgbClr val="2B6573"/>
                 </a:solidFill>
-                <a:latin typeface="Karla"/>
+                <a:latin typeface="Calibri"/>
               </a:rPr>
               <a:t>THE FORM TIME QUIZ  ·  ANSWERS  ·  QUESTION 9</a:t>
             </a:r>
@@ -11966,7 +11966,7 @@
                 <a:solidFill>
                   <a:srgbClr val="5C6552"/>
                 </a:solidFill>
-                <a:latin typeface="Karla"/>
+                <a:latin typeface="Calibri"/>
               </a:rPr>
               <a:t>How many legs does a spider have?</a:t>
             </a:r>
@@ -12004,11 +12004,11 @@
               </a:spcAft>
             </a:pPr>
             <a:r>
-              <a:rPr sz="3400" b="1" i="0">
+              <a:rPr sz="3400" b="0" i="0">
                 <a:solidFill>
                   <a:srgbClr val="2B6573"/>
                 </a:solidFill>
-                <a:latin typeface="Libre Caslon Display"/>
+                <a:latin typeface="Georgia"/>
               </a:rPr>
               <a:t>B.  Eight</a:t>
             </a:r>
@@ -12140,7 +12140,7 @@
                 <a:solidFill>
                   <a:srgbClr val="2E3436"/>
                 </a:solidFill>
-                <a:latin typeface="Karla"/>
+                <a:latin typeface="Calibri"/>
               </a:rPr>
               <a:t>Insects have six legs. Spiders have eight, which is why a spider is not an insect.</a:t>
             </a:r>
@@ -12206,7 +12206,7 @@
                 <a:solidFill>
                   <a:srgbClr val="8B9179"/>
                 </a:solidFill>
-                <a:latin typeface="Karla"/>
+                <a:latin typeface="Calibri"/>
               </a:rPr>
               <a:t>The Pastoral Guide</a:t>
             </a:r>
@@ -12248,7 +12248,7 @@
                 <a:solidFill>
                   <a:srgbClr val="8B9179"/>
                 </a:solidFill>
-                <a:latin typeface="Karla"/>
+                <a:latin typeface="Calibri"/>
               </a:rPr>
               <a:t>23 / 27</a:t>
             </a:r>
@@ -12352,7 +12352,7 @@
                 <a:solidFill>
                   <a:srgbClr val="2B6573"/>
                 </a:solidFill>
-                <a:latin typeface="Karla"/>
+                <a:latin typeface="Calibri"/>
               </a:rPr>
               <a:t>THE FORM TIME QUIZ  ·  ANSWERS  ·  QUESTION 10</a:t>
             </a:r>
@@ -12394,7 +12394,7 @@
                 <a:solidFill>
                   <a:srgbClr val="5C6552"/>
                 </a:solidFill>
-                <a:latin typeface="Karla"/>
+                <a:latin typeface="Calibri"/>
               </a:rPr>
               <a:t>Which continent has no countries?</a:t>
             </a:r>
@@ -12432,11 +12432,11 @@
               </a:spcAft>
             </a:pPr>
             <a:r>
-              <a:rPr sz="3400" b="1" i="0">
+              <a:rPr sz="3400" b="0" i="0">
                 <a:solidFill>
                   <a:srgbClr val="2B6573"/>
                 </a:solidFill>
-                <a:latin typeface="Libre Caslon Display"/>
+                <a:latin typeface="Georgia"/>
               </a:rPr>
               <a:t>Antarctica</a:t>
             </a:r>
@@ -12568,7 +12568,7 @@
                 <a:solidFill>
                   <a:srgbClr val="2E3436"/>
                 </a:solidFill>
-                <a:latin typeface="Karla"/>
+                <a:latin typeface="Calibri"/>
               </a:rPr>
               <a:t>It is looked after under a treaty signed in 1959. Nobody lives there for good, only scientists who come and go.</a:t>
             </a:r>
@@ -12634,7 +12634,7 @@
                 <a:solidFill>
                   <a:srgbClr val="8B9179"/>
                 </a:solidFill>
-                <a:latin typeface="Karla"/>
+                <a:latin typeface="Calibri"/>
               </a:rPr>
               <a:t>The Pastoral Guide</a:t>
             </a:r>
@@ -12676,7 +12676,7 @@
                 <a:solidFill>
                   <a:srgbClr val="8B9179"/>
                 </a:solidFill>
-                <a:latin typeface="Karla"/>
+                <a:latin typeface="Calibri"/>
               </a:rPr>
               <a:t>24 / 27</a:t>
             </a:r>
@@ -12780,7 +12780,7 @@
                 <a:solidFill>
                   <a:srgbClr val="2B6573"/>
                 </a:solidFill>
-                <a:latin typeface="Karla"/>
+                <a:latin typeface="Calibri"/>
               </a:rPr>
               <a:t>THE FORM TIME QUIZ  ·  VOLUME TWO</a:t>
             </a:r>
@@ -12842,11 +12842,11 @@
               </a:spcAft>
             </a:pPr>
             <a:r>
-              <a:rPr sz="3200" b="1" i="0">
+              <a:rPr sz="3200" b="0" i="0">
                 <a:solidFill>
                   <a:srgbClr val="2B6573"/>
                 </a:solidFill>
-                <a:latin typeface="Libre Caslon Display"/>
+                <a:latin typeface="Georgia"/>
               </a:rPr>
               <a:t>Scores back to their owners</a:t>
             </a:r>
@@ -12888,7 +12888,7 @@
                 <a:solidFill>
                   <a:srgbClr val="5C6552"/>
                 </a:solidFill>
-                <a:latin typeface="Karla"/>
+                <a:latin typeface="Calibri"/>
               </a:rPr>
               <a:t>Hands up if you got ten. Then hands up if one of the answers surprised you, and tell us which.</a:t>
             </a:r>
@@ -12930,7 +12930,7 @@
                 <a:solidFill>
                   <a:srgbClr val="8B9179"/>
                 </a:solidFill>
-                <a:latin typeface="Karla"/>
+                <a:latin typeface="Calibri"/>
               </a:rPr>
               <a:t>Volume Three is coming soon to thepastoralguide.com.</a:t>
             </a:r>
@@ -12996,7 +12996,7 @@
                 <a:solidFill>
                   <a:srgbClr val="8B9179"/>
                 </a:solidFill>
-                <a:latin typeface="Karla"/>
+                <a:latin typeface="Calibri"/>
               </a:rPr>
               <a:t>The Pastoral Guide</a:t>
             </a:r>
@@ -13038,7 +13038,7 @@
                 <a:solidFill>
                   <a:srgbClr val="8B9179"/>
                 </a:solidFill>
-                <a:latin typeface="Karla"/>
+                <a:latin typeface="Calibri"/>
               </a:rPr>
               <a:t>25 / 27</a:t>
             </a:r>
@@ -13155,7 +13155,7 @@
                 <a:solidFill>
                   <a:srgbClr val="2B6573"/>
                 </a:solidFill>
-                <a:latin typeface="Karla"/>
+                <a:latin typeface="Calibri"/>
               </a:rPr>
               <a:t>FOR THE TEACHER  ·  ADD YOUR OWN</a:t>
             </a:r>
@@ -13331,7 +13331,7 @@
                 <a:solidFill>
                   <a:srgbClr val="FFFDF7"/>
                 </a:solidFill>
-                <a:latin typeface="Karla"/>
+                <a:latin typeface="Calibri"/>
               </a:rPr>
               <a:t>?</a:t>
             </a:r>
@@ -13369,11 +13369,11 @@
               </a:spcAft>
             </a:pPr>
             <a:r>
-              <a:rPr sz="2400" b="1" i="0">
+              <a:rPr sz="2400" b="0" i="0">
                 <a:solidFill>
                   <a:srgbClr val="2B6573"/>
                 </a:solidFill>
-                <a:latin typeface="Libre Caslon Display"/>
+                <a:latin typeface="Georgia"/>
               </a:rPr>
               <a:t>[ Type your own question here ]</a:t>
             </a:r>
@@ -13415,7 +13415,7 @@
                 <a:solidFill>
                   <a:srgbClr val="5C6552"/>
                 </a:solidFill>
-                <a:latin typeface="Karla"/>
+                <a:latin typeface="Calibri"/>
               </a:rPr>
               <a:t>Add your own questions here: something from assembly, a date coming up, or a question about your own school.</a:t>
             </a:r>
@@ -13437,7 +13437,7 @@
                 <a:solidFill>
                   <a:srgbClr val="5C6552"/>
                 </a:solidFill>
-                <a:latin typeface="Karla"/>
+                <a:latin typeface="Calibri"/>
               </a:rPr>
               <a:t>Duplicate this slide for each one and drag it in after question 10. There are two spare rows on the answer sheet for them.</a:t>
             </a:r>
@@ -13503,7 +13503,7 @@
                 <a:solidFill>
                   <a:srgbClr val="8B9179"/>
                 </a:solidFill>
-                <a:latin typeface="Karla"/>
+                <a:latin typeface="Calibri"/>
               </a:rPr>
               <a:t>The Pastoral Guide</a:t>
             </a:r>
@@ -13545,7 +13545,7 @@
                 <a:solidFill>
                   <a:srgbClr val="8B9179"/>
                 </a:solidFill>
-                <a:latin typeface="Karla"/>
+                <a:latin typeface="Calibri"/>
               </a:rPr>
               <a:t>26 / 27</a:t>
             </a:r>
@@ -13662,7 +13662,7 @@
                 <a:solidFill>
                   <a:srgbClr val="2B6573"/>
                 </a:solidFill>
-                <a:latin typeface="Karla"/>
+                <a:latin typeface="Calibri"/>
               </a:rPr>
               <a:t>FOR THE TEACHER  ·  ADD YOUR OWN</a:t>
             </a:r>
@@ -13704,7 +13704,7 @@
                 <a:solidFill>
                   <a:srgbClr val="5C6552"/>
                 </a:solidFill>
-                <a:latin typeface="Karla"/>
+                <a:latin typeface="Calibri"/>
               </a:rPr>
               <a:t>[ Your question again, so the room remembers it ]</a:t>
             </a:r>
@@ -13742,11 +13742,11 @@
               </a:spcAft>
             </a:pPr>
             <a:r>
-              <a:rPr sz="3400" b="1" i="0">
+              <a:rPr sz="3400" b="0" i="0">
                 <a:solidFill>
                   <a:srgbClr val="2B6573"/>
                 </a:solidFill>
-                <a:latin typeface="Libre Caslon Display"/>
+                <a:latin typeface="Georgia"/>
               </a:rPr>
               <a:t>[ The answer ]</a:t>
             </a:r>
@@ -13878,7 +13878,7 @@
                 <a:solidFill>
                   <a:srgbClr val="2E3436"/>
                 </a:solidFill>
-                <a:latin typeface="Karla"/>
+                <a:latin typeface="Calibri"/>
               </a:rPr>
               <a:t>[ One line on why, if there is something worth knowing ]</a:t>
             </a:r>
@@ -13920,7 +13920,7 @@
                 <a:solidFill>
                   <a:srgbClr val="5C6552"/>
                 </a:solidFill>
-                <a:latin typeface="Karla"/>
+                <a:latin typeface="Calibri"/>
               </a:rPr>
               <a:t>Duplicate this slide for each of your own questions and drag it in after the answer to question 10.</a:t>
             </a:r>
@@ -13986,7 +13986,7 @@
                 <a:solidFill>
                   <a:srgbClr val="8B9179"/>
                 </a:solidFill>
-                <a:latin typeface="Karla"/>
+                <a:latin typeface="Calibri"/>
               </a:rPr>
               <a:t>The Pastoral Guide</a:t>
             </a:r>
@@ -14028,7 +14028,7 @@
                 <a:solidFill>
                   <a:srgbClr val="8B9179"/>
                 </a:solidFill>
-                <a:latin typeface="Karla"/>
+                <a:latin typeface="Calibri"/>
               </a:rPr>
               <a:t>27 / 27</a:t>
             </a:r>
@@ -14132,7 +14132,7 @@
                 <a:solidFill>
                   <a:srgbClr val="2B6573"/>
                 </a:solidFill>
-                <a:latin typeface="Karla"/>
+                <a:latin typeface="Calibri"/>
               </a:rPr>
               <a:t>THE FORM TIME QUIZ  ·  ROUND ONE  ·  QUESTION 1 OF 10</a:t>
             </a:r>
@@ -14308,7 +14308,7 @@
                 <a:solidFill>
                   <a:srgbClr val="FFFDF7"/>
                 </a:solidFill>
-                <a:latin typeface="Karla"/>
+                <a:latin typeface="Calibri"/>
               </a:rPr>
               <a:t>1</a:t>
             </a:r>
@@ -14346,11 +14346,11 @@
               </a:spcAft>
             </a:pPr>
             <a:r>
-              <a:rPr sz="2400" b="1" i="0">
+              <a:rPr sz="2400" b="0" i="0">
                 <a:solidFill>
                   <a:srgbClr val="2B6573"/>
                 </a:solidFill>
-                <a:latin typeface="Libre Caslon Display"/>
+                <a:latin typeface="Georgia"/>
               </a:rPr>
               <a:t>Bats are blind.</a:t>
             </a:r>
@@ -14392,7 +14392,7 @@
                 <a:solidFill>
                   <a:srgbClr val="8B9179"/>
                 </a:solidFill>
-                <a:latin typeface="Karla"/>
+                <a:latin typeface="Calibri"/>
               </a:rPr>
               <a:t>FACT OR MYTH?</a:t>
             </a:r>
@@ -14520,11 +14520,11 @@
               </a:spcAft>
             </a:pPr>
             <a:r>
-              <a:rPr sz="2000" b="1" i="0">
+              <a:rPr sz="2000" b="0" i="0">
                 <a:solidFill>
                   <a:srgbClr val="2B6573"/>
                 </a:solidFill>
-                <a:latin typeface="Libre Caslon Display"/>
+                <a:latin typeface="Georgia"/>
               </a:rPr>
               <a:t>Fact</a:t>
             </a:r>
@@ -14652,11 +14652,11 @@
               </a:spcAft>
             </a:pPr>
             <a:r>
-              <a:rPr sz="2000" b="1" i="0">
+              <a:rPr sz="2000" b="0" i="0">
                 <a:solidFill>
                   <a:srgbClr val="2B6573"/>
                 </a:solidFill>
-                <a:latin typeface="Libre Caslon Display"/>
+                <a:latin typeface="Georgia"/>
               </a:rPr>
               <a:t>Myth</a:t>
             </a:r>
@@ -14698,7 +14698,7 @@
                 <a:solidFill>
                   <a:srgbClr val="5C6552"/>
                 </a:solidFill>
-                <a:latin typeface="Karla"/>
+                <a:latin typeface="Calibri"/>
               </a:rPr>
               <a:t>Agree it as a team, then tick it on the sheet.</a:t>
             </a:r>
@@ -14764,7 +14764,7 @@
                 <a:solidFill>
                   <a:srgbClr val="8B9179"/>
                 </a:solidFill>
-                <a:latin typeface="Karla"/>
+                <a:latin typeface="Calibri"/>
               </a:rPr>
               <a:t>The Pastoral Guide</a:t>
             </a:r>
@@ -14806,7 +14806,7 @@
                 <a:solidFill>
                   <a:srgbClr val="8B9179"/>
                 </a:solidFill>
-                <a:latin typeface="Karla"/>
+                <a:latin typeface="Calibri"/>
               </a:rPr>
               <a:t>3 / 27</a:t>
             </a:r>
@@ -14910,7 +14910,7 @@
                 <a:solidFill>
                   <a:srgbClr val="2B6573"/>
                 </a:solidFill>
-                <a:latin typeface="Karla"/>
+                <a:latin typeface="Calibri"/>
               </a:rPr>
               <a:t>THE FORM TIME QUIZ  ·  ROUND ONE  ·  QUESTION 2 OF 10</a:t>
             </a:r>
@@ -15086,7 +15086,7 @@
                 <a:solidFill>
                   <a:srgbClr val="FFFDF7"/>
                 </a:solidFill>
-                <a:latin typeface="Karla"/>
+                <a:latin typeface="Calibri"/>
               </a:rPr>
               <a:t>2</a:t>
             </a:r>
@@ -15124,11 +15124,11 @@
               </a:spcAft>
             </a:pPr>
             <a:r>
-              <a:rPr sz="2400" b="1" i="0">
+              <a:rPr sz="2400" b="0" i="0">
                 <a:solidFill>
                   <a:srgbClr val="2B6573"/>
                 </a:solidFill>
-                <a:latin typeface="Libre Caslon Display"/>
+                <a:latin typeface="Georgia"/>
               </a:rPr>
               <a:t>Lemmings jump off cliffs together on purpose.</a:t>
             </a:r>
@@ -15170,7 +15170,7 @@
                 <a:solidFill>
                   <a:srgbClr val="8B9179"/>
                 </a:solidFill>
-                <a:latin typeface="Karla"/>
+                <a:latin typeface="Calibri"/>
               </a:rPr>
               <a:t>FACT OR MYTH?</a:t>
             </a:r>
@@ -15298,11 +15298,11 @@
               </a:spcAft>
             </a:pPr>
             <a:r>
-              <a:rPr sz="2000" b="1" i="0">
+              <a:rPr sz="2000" b="0" i="0">
                 <a:solidFill>
                   <a:srgbClr val="2B6573"/>
                 </a:solidFill>
-                <a:latin typeface="Libre Caslon Display"/>
+                <a:latin typeface="Georgia"/>
               </a:rPr>
               <a:t>Fact</a:t>
             </a:r>
@@ -15430,11 +15430,11 @@
               </a:spcAft>
             </a:pPr>
             <a:r>
-              <a:rPr sz="2000" b="1" i="0">
+              <a:rPr sz="2000" b="0" i="0">
                 <a:solidFill>
                   <a:srgbClr val="2B6573"/>
                 </a:solidFill>
-                <a:latin typeface="Libre Caslon Display"/>
+                <a:latin typeface="Georgia"/>
               </a:rPr>
               <a:t>Myth</a:t>
             </a:r>
@@ -15476,7 +15476,7 @@
                 <a:solidFill>
                   <a:srgbClr val="5C6552"/>
                 </a:solidFill>
-                <a:latin typeface="Karla"/>
+                <a:latin typeface="Calibri"/>
               </a:rPr>
               <a:t>Agree it as a team, then tick it on the sheet.</a:t>
             </a:r>
@@ -15542,7 +15542,7 @@
                 <a:solidFill>
                   <a:srgbClr val="8B9179"/>
                 </a:solidFill>
-                <a:latin typeface="Karla"/>
+                <a:latin typeface="Calibri"/>
               </a:rPr>
               <a:t>The Pastoral Guide</a:t>
             </a:r>
@@ -15584,7 +15584,7 @@
                 <a:solidFill>
                   <a:srgbClr val="8B9179"/>
                 </a:solidFill>
-                <a:latin typeface="Karla"/>
+                <a:latin typeface="Calibri"/>
               </a:rPr>
               <a:t>4 / 27</a:t>
             </a:r>
@@ -15688,7 +15688,7 @@
                 <a:solidFill>
                   <a:srgbClr val="2B6573"/>
                 </a:solidFill>
-                <a:latin typeface="Karla"/>
+                <a:latin typeface="Calibri"/>
               </a:rPr>
               <a:t>THE FORM TIME QUIZ  ·  ROUND ONE  ·  QUESTION 3 OF 10</a:t>
             </a:r>
@@ -15864,7 +15864,7 @@
                 <a:solidFill>
                   <a:srgbClr val="FFFDF7"/>
                 </a:solidFill>
-                <a:latin typeface="Karla"/>
+                <a:latin typeface="Calibri"/>
               </a:rPr>
               <a:t>3</a:t>
             </a:r>
@@ -15902,11 +15902,11 @@
               </a:spcAft>
             </a:pPr>
             <a:r>
-              <a:rPr sz="2400" b="1" i="0">
+              <a:rPr sz="2400" b="0" i="0">
                 <a:solidFill>
                   <a:srgbClr val="2B6573"/>
                 </a:solidFill>
-                <a:latin typeface="Libre Caslon Display"/>
+                <a:latin typeface="Georgia"/>
               </a:rPr>
               <a:t>What does a camel store in its hump?</a:t>
             </a:r>
@@ -15948,7 +15948,7 @@
                 <a:solidFill>
                   <a:srgbClr val="8B9179"/>
                 </a:solidFill>
-                <a:latin typeface="Karla"/>
+                <a:latin typeface="Calibri"/>
               </a:rPr>
               <a:t>ONE OF THESE</a:t>
             </a:r>
@@ -16124,7 +16124,7 @@
                 <a:solidFill>
                   <a:srgbClr val="FFFDF7"/>
                 </a:solidFill>
-                <a:latin typeface="Karla"/>
+                <a:latin typeface="Calibri"/>
               </a:rPr>
               <a:t>A</a:t>
             </a:r>
@@ -16166,7 +16166,7 @@
                 <a:solidFill>
                   <a:srgbClr val="2E3436"/>
                 </a:solidFill>
-                <a:latin typeface="Karla"/>
+                <a:latin typeface="Calibri"/>
               </a:rPr>
               <a:t>Water</a:t>
             </a:r>
@@ -16342,7 +16342,7 @@
                 <a:solidFill>
                   <a:srgbClr val="FFFDF7"/>
                 </a:solidFill>
-                <a:latin typeface="Karla"/>
+                <a:latin typeface="Calibri"/>
               </a:rPr>
               <a:t>B</a:t>
             </a:r>
@@ -16384,7 +16384,7 @@
                 <a:solidFill>
                   <a:srgbClr val="2E3436"/>
                 </a:solidFill>
-                <a:latin typeface="Karla"/>
+                <a:latin typeface="Calibri"/>
               </a:rPr>
               <a:t>Fat</a:t>
             </a:r>
@@ -16560,7 +16560,7 @@
                 <a:solidFill>
                   <a:srgbClr val="FFFDF7"/>
                 </a:solidFill>
-                <a:latin typeface="Karla"/>
+                <a:latin typeface="Calibri"/>
               </a:rPr>
               <a:t>C</a:t>
             </a:r>
@@ -16602,7 +16602,7 @@
                 <a:solidFill>
                   <a:srgbClr val="2E3436"/>
                 </a:solidFill>
-                <a:latin typeface="Karla"/>
+                <a:latin typeface="Calibri"/>
               </a:rPr>
               <a:t>Milk</a:t>
             </a:r>
@@ -16644,7 +16644,7 @@
                 <a:solidFill>
                   <a:srgbClr val="5C6552"/>
                 </a:solidFill>
-                <a:latin typeface="Karla"/>
+                <a:latin typeface="Calibri"/>
               </a:rPr>
               <a:t>Agree it as a team, then tick it on the sheet.</a:t>
             </a:r>
@@ -16710,7 +16710,7 @@
                 <a:solidFill>
                   <a:srgbClr val="8B9179"/>
                 </a:solidFill>
-                <a:latin typeface="Karla"/>
+                <a:latin typeface="Calibri"/>
               </a:rPr>
               <a:t>The Pastoral Guide</a:t>
             </a:r>
@@ -16752,7 +16752,7 @@
                 <a:solidFill>
                   <a:srgbClr val="8B9179"/>
                 </a:solidFill>
-                <a:latin typeface="Karla"/>
+                <a:latin typeface="Calibri"/>
               </a:rPr>
               <a:t>5 / 27</a:t>
             </a:r>
@@ -16856,7 +16856,7 @@
                 <a:solidFill>
                   <a:srgbClr val="2B6573"/>
                 </a:solidFill>
-                <a:latin typeface="Karla"/>
+                <a:latin typeface="Calibri"/>
               </a:rPr>
               <a:t>THE FORM TIME QUIZ  ·  ROUND ONE  ·  QUESTION 4 OF 10</a:t>
             </a:r>
@@ -17032,7 +17032,7 @@
                 <a:solidFill>
                   <a:srgbClr val="FFFDF7"/>
                 </a:solidFill>
-                <a:latin typeface="Karla"/>
+                <a:latin typeface="Calibri"/>
               </a:rPr>
               <a:t>4</a:t>
             </a:r>
@@ -17070,11 +17070,11 @@
               </a:spcAft>
             </a:pPr>
             <a:r>
-              <a:rPr sz="2400" b="1" i="0">
+              <a:rPr sz="2400" b="0" i="0">
                 <a:solidFill>
                   <a:srgbClr val="2B6573"/>
                 </a:solidFill>
-                <a:latin typeface="Libre Caslon Display"/>
+                <a:latin typeface="Georgia"/>
               </a:rPr>
               <a:t>Humans have three types of colour-sensing cell in their eyes. How many types do dogs have?</a:t>
             </a:r>
@@ -17116,7 +17116,7 @@
                 <a:solidFill>
                   <a:srgbClr val="8B9179"/>
                 </a:solidFill>
-                <a:latin typeface="Karla"/>
+                <a:latin typeface="Calibri"/>
               </a:rPr>
               <a:t>ONE OF THESE</a:t>
             </a:r>
@@ -17292,7 +17292,7 @@
                 <a:solidFill>
                   <a:srgbClr val="FFFDF7"/>
                 </a:solidFill>
-                <a:latin typeface="Karla"/>
+                <a:latin typeface="Calibri"/>
               </a:rPr>
               <a:t>A</a:t>
             </a:r>
@@ -17334,7 +17334,7 @@
                 <a:solidFill>
                   <a:srgbClr val="2E3436"/>
                 </a:solidFill>
-                <a:latin typeface="Karla"/>
+                <a:latin typeface="Calibri"/>
               </a:rPr>
               <a:t>One</a:t>
             </a:r>
@@ -17510,7 +17510,7 @@
                 <a:solidFill>
                   <a:srgbClr val="FFFDF7"/>
                 </a:solidFill>
-                <a:latin typeface="Karla"/>
+                <a:latin typeface="Calibri"/>
               </a:rPr>
               <a:t>B</a:t>
             </a:r>
@@ -17552,7 +17552,7 @@
                 <a:solidFill>
                   <a:srgbClr val="2E3436"/>
                 </a:solidFill>
-                <a:latin typeface="Karla"/>
+                <a:latin typeface="Calibri"/>
               </a:rPr>
               <a:t>Two</a:t>
             </a:r>
@@ -17728,7 +17728,7 @@
                 <a:solidFill>
                   <a:srgbClr val="FFFDF7"/>
                 </a:solidFill>
-                <a:latin typeface="Karla"/>
+                <a:latin typeface="Calibri"/>
               </a:rPr>
               <a:t>C</a:t>
             </a:r>
@@ -17770,7 +17770,7 @@
                 <a:solidFill>
                   <a:srgbClr val="2E3436"/>
                 </a:solidFill>
-                <a:latin typeface="Karla"/>
+                <a:latin typeface="Calibri"/>
               </a:rPr>
               <a:t>Three</a:t>
             </a:r>
@@ -17812,7 +17812,7 @@
                 <a:solidFill>
                   <a:srgbClr val="5C6552"/>
                 </a:solidFill>
-                <a:latin typeface="Karla"/>
+                <a:latin typeface="Calibri"/>
               </a:rPr>
               <a:t>Agree it as a team, then tick it on the sheet.</a:t>
             </a:r>
@@ -17878,7 +17878,7 @@
                 <a:solidFill>
                   <a:srgbClr val="8B9179"/>
                 </a:solidFill>
-                <a:latin typeface="Karla"/>
+                <a:latin typeface="Calibri"/>
               </a:rPr>
               <a:t>The Pastoral Guide</a:t>
             </a:r>
@@ -17920,7 +17920,7 @@
                 <a:solidFill>
                   <a:srgbClr val="8B9179"/>
                 </a:solidFill>
-                <a:latin typeface="Karla"/>
+                <a:latin typeface="Calibri"/>
               </a:rPr>
               <a:t>6 / 27</a:t>
             </a:r>
@@ -18024,7 +18024,7 @@
                 <a:solidFill>
                   <a:srgbClr val="2B6573"/>
                 </a:solidFill>
-                <a:latin typeface="Karla"/>
+                <a:latin typeface="Calibri"/>
               </a:rPr>
               <a:t>THE FORM TIME QUIZ  ·  ROUND ONE  ·  QUESTION 5 OF 10</a:t>
             </a:r>
@@ -18200,7 +18200,7 @@
                 <a:solidFill>
                   <a:srgbClr val="FFFDF7"/>
                 </a:solidFill>
-                <a:latin typeface="Karla"/>
+                <a:latin typeface="Calibri"/>
               </a:rPr>
               <a:t>5</a:t>
             </a:r>
@@ -18238,11 +18238,11 @@
               </a:spcAft>
             </a:pPr>
             <a:r>
-              <a:rPr sz="2400" b="1" i="0">
+              <a:rPr sz="2400" b="0" i="0">
                 <a:solidFill>
                   <a:srgbClr val="2B6573"/>
                 </a:solidFill>
-                <a:latin typeface="Libre Caslon Display"/>
+                <a:latin typeface="Georgia"/>
               </a:rPr>
               <a:t>An owl cannot turn its head all the way round. How far can it turn its head in either direction?</a:t>
             </a:r>
@@ -18284,7 +18284,7 @@
                 <a:solidFill>
                   <a:srgbClr val="8B9179"/>
                 </a:solidFill>
-                <a:latin typeface="Karla"/>
+                <a:latin typeface="Calibri"/>
               </a:rPr>
               <a:t>ONE OF THESE</a:t>
             </a:r>
@@ -18460,7 +18460,7 @@
                 <a:solidFill>
                   <a:srgbClr val="FFFDF7"/>
                 </a:solidFill>
-                <a:latin typeface="Karla"/>
+                <a:latin typeface="Calibri"/>
               </a:rPr>
               <a:t>A</a:t>
             </a:r>
@@ -18502,7 +18502,7 @@
                 <a:solidFill>
                   <a:srgbClr val="2E3436"/>
                 </a:solidFill>
-                <a:latin typeface="Karla"/>
+                <a:latin typeface="Calibri"/>
               </a:rPr>
               <a:t>90 degrees</a:t>
             </a:r>
@@ -18678,7 +18678,7 @@
                 <a:solidFill>
                   <a:srgbClr val="FFFDF7"/>
                 </a:solidFill>
-                <a:latin typeface="Karla"/>
+                <a:latin typeface="Calibri"/>
               </a:rPr>
               <a:t>B</a:t>
             </a:r>
@@ -18720,7 +18720,7 @@
                 <a:solidFill>
                   <a:srgbClr val="2E3436"/>
                 </a:solidFill>
-                <a:latin typeface="Karla"/>
+                <a:latin typeface="Calibri"/>
               </a:rPr>
               <a:t>180 degrees</a:t>
             </a:r>
@@ -18896,7 +18896,7 @@
                 <a:solidFill>
                   <a:srgbClr val="FFFDF7"/>
                 </a:solidFill>
-                <a:latin typeface="Karla"/>
+                <a:latin typeface="Calibri"/>
               </a:rPr>
               <a:t>C</a:t>
             </a:r>
@@ -18938,7 +18938,7 @@
                 <a:solidFill>
                   <a:srgbClr val="2E3436"/>
                 </a:solidFill>
-                <a:latin typeface="Karla"/>
+                <a:latin typeface="Calibri"/>
               </a:rPr>
               <a:t>270 degrees</a:t>
             </a:r>
@@ -18980,7 +18980,7 @@
                 <a:solidFill>
                   <a:srgbClr val="5C6552"/>
                 </a:solidFill>
-                <a:latin typeface="Karla"/>
+                <a:latin typeface="Calibri"/>
               </a:rPr>
               <a:t>Agree it as a team, then tick it on the sheet.</a:t>
             </a:r>
@@ -19046,7 +19046,7 @@
                 <a:solidFill>
                   <a:srgbClr val="8B9179"/>
                 </a:solidFill>
-                <a:latin typeface="Karla"/>
+                <a:latin typeface="Calibri"/>
               </a:rPr>
               <a:t>The Pastoral Guide</a:t>
             </a:r>
@@ -19088,7 +19088,7 @@
                 <a:solidFill>
                   <a:srgbClr val="8B9179"/>
                 </a:solidFill>
-                <a:latin typeface="Karla"/>
+                <a:latin typeface="Calibri"/>
               </a:rPr>
               <a:t>7 / 27</a:t>
             </a:r>
@@ -19192,7 +19192,7 @@
                 <a:solidFill>
                   <a:srgbClr val="2B6573"/>
                 </a:solidFill>
-                <a:latin typeface="Karla"/>
+                <a:latin typeface="Calibri"/>
               </a:rPr>
               <a:t>THE FORM TIME QUIZ  ·  ROUND ONE  ·  QUESTION 6 OF 10</a:t>
             </a:r>
@@ -19368,7 +19368,7 @@
                 <a:solidFill>
                   <a:srgbClr val="FFFDF7"/>
                 </a:solidFill>
-                <a:latin typeface="Karla"/>
+                <a:latin typeface="Calibri"/>
               </a:rPr>
               <a:t>6</a:t>
             </a:r>
@@ -19406,11 +19406,11 @@
               </a:spcAft>
             </a:pPr>
             <a:r>
-              <a:rPr sz="2100" b="1" i="0">
+              <a:rPr sz="2100" b="0" i="0">
                 <a:solidFill>
                   <a:srgbClr val="2B6573"/>
                 </a:solidFill>
-                <a:latin typeface="Libre Caslon Display"/>
+                <a:latin typeface="Georgia"/>
               </a:rPr>
               <a:t>In a 2001 study, fish learned to escape through a net. How many months later did they still know the way out?</a:t>
             </a:r>
@@ -19496,7 +19496,7 @@
                 <a:solidFill>
                   <a:srgbClr val="8B9179"/>
                 </a:solidFill>
-                <a:latin typeface="Karla"/>
+                <a:latin typeface="Calibri"/>
               </a:rPr>
               <a:t>Agree it as a team, then write it on the sheet.</a:t>
             </a:r>
@@ -19562,7 +19562,7 @@
                 <a:solidFill>
                   <a:srgbClr val="8B9179"/>
                 </a:solidFill>
-                <a:latin typeface="Karla"/>
+                <a:latin typeface="Calibri"/>
               </a:rPr>
               <a:t>The Pastoral Guide</a:t>
             </a:r>
@@ -19604,7 +19604,7 @@
                 <a:solidFill>
                   <a:srgbClr val="8B9179"/>
                 </a:solidFill>
-                <a:latin typeface="Karla"/>
+                <a:latin typeface="Calibri"/>
               </a:rPr>
               <a:t>8 / 27</a:t>
             </a:r>
@@ -19721,7 +19721,7 @@
                 <a:solidFill>
                   <a:srgbClr val="2B6573"/>
                 </a:solidFill>
-                <a:latin typeface="Karla"/>
+                <a:latin typeface="Calibri"/>
               </a:rPr>
               <a:t>ROUND TWO</a:t>
             </a:r>
@@ -19759,11 +19759,11 @@
               </a:spcAft>
             </a:pPr>
             <a:r>
-              <a:rPr sz="4000" b="1" i="0">
+              <a:rPr sz="4000" b="0" i="0">
                 <a:solidFill>
                   <a:srgbClr val="FFFDF7"/>
                 </a:solidFill>
-                <a:latin typeface="Libre Caslon Display"/>
+                <a:latin typeface="Georgia"/>
               </a:rPr>
               <a:t>General knowledge</a:t>
             </a:r>
@@ -19849,7 +19849,7 @@
                 <a:solidFill>
                   <a:srgbClr val="C4DCE1"/>
                 </a:solidFill>
-                <a:latin typeface="Karla"/>
+                <a:latin typeface="Calibri"/>
               </a:rPr>
               <a:t>Four questions to finish. Some have options, and some you write out in full.</a:t>
             </a:r>
@@ -19915,7 +19915,7 @@
                 <a:solidFill>
                   <a:srgbClr val="C4DCE1"/>
                 </a:solidFill>
-                <a:latin typeface="Karla"/>
+                <a:latin typeface="Calibri"/>
               </a:rPr>
               <a:t>The Pastoral Guide</a:t>
             </a:r>
@@ -19957,7 +19957,7 @@
                 <a:solidFill>
                   <a:srgbClr val="C4DCE1"/>
                 </a:solidFill>
-                <a:latin typeface="Karla"/>
+                <a:latin typeface="Calibri"/>
               </a:rPr>
               <a:t>9 / 27</a:t>
             </a:r>
